--- a/social/regenerative-2026-10-15/single-3/regenerative-single-3-canva.pptx
+++ b/social/regenerative-2026-10-15/single-3/regenerative-single-3-canva.pptx
@@ -3129,7 +3129,7 @@
         <p:spPr>
           <a:xfrm>
             <a:off x="0" y="0"/>
-            <a:ext cx="9144000" cy="4741333"/>
+            <a:ext cx="9144000" cy="6942667"/>
           </a:xfrm>
           <a:prstGeom prst="rect">
             <a:avLst/>
@@ -3160,64 +3160,16 @@
           </a:prstGeom>
         </p:spPr>
       </p:pic>
-      <p:pic>
-        <p:nvPicPr>
-          <p:cNvPr id="5" name="rule-1" descr="s1-07-rule-1.png"/>
-          <p:cNvPicPr>
-            <a:picLocks noChangeAspect="1"/>
-          </p:cNvPicPr>
+      <p:sp>
+        <p:nvSpPr>
+          <p:cNvPr id="5" name="headline"/>
+          <p:cNvSpPr txBox="1"/>
           <p:nvPr/>
-        </p:nvPicPr>
-        <p:blipFill>
-          <a:blip r:embed="rId5"/>
-          <a:stretch>
-            <a:fillRect/>
-          </a:stretch>
-        </p:blipFill>
+        </p:nvSpPr>
         <p:spPr>
           <a:xfrm>
-            <a:off x="609600" y="7501467"/>
-            <a:ext cx="7924800" cy="25400"/>
-          </a:xfrm>
-          <a:prstGeom prst="rect">
-            <a:avLst/>
-          </a:prstGeom>
-        </p:spPr>
-      </p:pic>
-      <p:pic>
-        <p:nvPicPr>
-          <p:cNvPr id="6" name="rule-2" descr="s1-07-rule-1.png"/>
-          <p:cNvPicPr>
-            <a:picLocks noChangeAspect="1"/>
-          </p:cNvPicPr>
-          <p:nvPr/>
-        </p:nvPicPr>
-        <p:blipFill>
-          <a:blip r:embed="rId5"/>
-          <a:stretch>
-            <a:fillRect/>
-          </a:stretch>
-        </p:blipFill>
-        <p:spPr>
-          <a:xfrm>
-            <a:off x="609600" y="8085667"/>
-            <a:ext cx="7924800" cy="25400"/>
-          </a:xfrm>
-          <a:prstGeom prst="rect">
-            <a:avLst/>
-          </a:prstGeom>
-        </p:spPr>
-      </p:pic>
-      <p:sp>
-        <p:nvSpPr>
-          <p:cNvPr id="7" name="headline"/>
-          <p:cNvSpPr txBox="1"/>
-          <p:nvPr/>
-        </p:nvSpPr>
-        <p:spPr>
-          <a:xfrm>
-            <a:off x="609600" y="4995333"/>
-            <a:ext cx="7924800" cy="1354667"/>
+            <a:off x="609600" y="7281333"/>
+            <a:ext cx="7924800" cy="2370667"/>
           </a:xfrm>
           <a:prstGeom prst="rect">
             <a:avLst/>
@@ -3232,11 +3184,11 @@
           <a:p>
             <a:pPr algn="l">
               <a:lnSpc>
-                <a:spcPct val="110000"/>
+                <a:spcPct val="106000"/>
               </a:lnSpc>
             </a:pPr>
             <a:r>
-              <a:rPr sz="4270" b="1">
+              <a:rPr sz="6130" b="1">
                 <a:solidFill>
                   <a:srgbClr val="4F3433"/>
                 </a:solidFill>
@@ -3249,14 +3201,14 @@
       </p:sp>
       <p:sp>
         <p:nvSpPr>
-          <p:cNvPr id="8" name="small-line"/>
+          <p:cNvPr id="6" name="small-line"/>
           <p:cNvSpPr txBox="1"/>
           <p:nvPr/>
         </p:nvSpPr>
         <p:spPr>
           <a:xfrm>
-            <a:off x="626533" y="6307667"/>
-            <a:ext cx="6773333" cy="423333"/>
+            <a:off x="643467" y="9906000"/>
+            <a:ext cx="7620000" cy="541867"/>
           </a:xfrm>
           <a:prstGeom prst="rect">
             <a:avLst/>
@@ -3275,196 +3227,13 @@
               </a:lnSpc>
             </a:pPr>
             <a:r>
-              <a:rPr sz="2670" b="1">
+              <a:rPr sz="3329" b="1">
                 <a:solidFill>
                   <a:srgbClr val="156826"/>
                 </a:solidFill>
                 <a:latin typeface="Source Sans Pro"/>
               </a:rPr>
               <a:t>And who gets to decide?</a:t>
-            </a:r>
-          </a:p>
-        </p:txBody>
-      </p:sp>
-      <p:sp>
-        <p:nvSpPr>
-          <p:cNvPr id="9" name="question-1"/>
-          <p:cNvSpPr txBox="1"/>
-          <p:nvPr/>
-        </p:nvSpPr>
-        <p:spPr>
-          <a:xfrm>
-            <a:off x="609600" y="7027333"/>
-            <a:ext cx="7924800" cy="381000"/>
-          </a:xfrm>
-          <a:prstGeom prst="rect">
-            <a:avLst/>
-          </a:prstGeom>
-          <a:noFill/>
-        </p:spPr>
-        <p:txBody>
-          <a:bodyPr wrap="square" lIns="0" rIns="0" tIns="0" bIns="0">
-            <a:spAutoFit/>
-          </a:bodyPr>
-          <a:lstStyle/>
-          <a:p>
-            <a:pPr algn="l">
-              <a:lnSpc>
-                <a:spcPct val="112000"/>
-              </a:lnSpc>
-            </a:pPr>
-            <a:r>
-              <a:rPr sz="2670" b="1">
-                <a:solidFill>
-                  <a:srgbClr val="4F3433"/>
-                </a:solidFill>
-                <a:latin typeface="Montserrat"/>
-              </a:rPr>
-              <a:t>A destination </a:t>
-            </a:r>
-            <a:r>
-              <a:rPr sz="2670" b="1">
-                <a:solidFill>
-                  <a:srgbClr val="156826"/>
-                </a:solidFill>
-                <a:latin typeface="Montserrat"/>
-              </a:rPr>
-              <a:t>or a direction?</a:t>
-            </a:r>
-          </a:p>
-        </p:txBody>
-      </p:sp>
-      <p:sp>
-        <p:nvSpPr>
-          <p:cNvPr id="10" name="question-2"/>
-          <p:cNvSpPr txBox="1"/>
-          <p:nvPr/>
-        </p:nvSpPr>
-        <p:spPr>
-          <a:xfrm>
-            <a:off x="609600" y="7611533"/>
-            <a:ext cx="7924800" cy="381000"/>
-          </a:xfrm>
-          <a:prstGeom prst="rect">
-            <a:avLst/>
-          </a:prstGeom>
-          <a:noFill/>
-        </p:spPr>
-        <p:txBody>
-          <a:bodyPr wrap="square" lIns="0" rIns="0" tIns="0" bIns="0">
-            <a:spAutoFit/>
-          </a:bodyPr>
-          <a:lstStyle/>
-          <a:p>
-            <a:pPr algn="l">
-              <a:lnSpc>
-                <a:spcPct val="112000"/>
-              </a:lnSpc>
-            </a:pPr>
-            <a:r>
-              <a:rPr sz="2670" b="1">
-                <a:solidFill>
-                  <a:srgbClr val="4F3433"/>
-                </a:solidFill>
-                <a:latin typeface="Montserrat"/>
-              </a:rPr>
-              <a:t>A certified status </a:t>
-            </a:r>
-            <a:r>
-              <a:rPr sz="2670" b="1">
-                <a:solidFill>
-                  <a:srgbClr val="156826"/>
-                </a:solidFill>
-                <a:latin typeface="Montserrat"/>
-              </a:rPr>
-              <a:t>or a way of thinking?</a:t>
-            </a:r>
-          </a:p>
-        </p:txBody>
-      </p:sp>
-      <p:sp>
-        <p:nvSpPr>
-          <p:cNvPr id="11" name="question-3"/>
-          <p:cNvSpPr txBox="1"/>
-          <p:nvPr/>
-        </p:nvSpPr>
-        <p:spPr>
-          <a:xfrm>
-            <a:off x="609600" y="8195733"/>
-            <a:ext cx="7924800" cy="762000"/>
-          </a:xfrm>
-          <a:prstGeom prst="rect">
-            <a:avLst/>
-          </a:prstGeom>
-          <a:noFill/>
-        </p:spPr>
-        <p:txBody>
-          <a:bodyPr wrap="square" lIns="0" rIns="0" tIns="0" bIns="0">
-            <a:spAutoFit/>
-          </a:bodyPr>
-          <a:lstStyle/>
-          <a:p>
-            <a:pPr algn="l">
-              <a:lnSpc>
-                <a:spcPct val="112000"/>
-              </a:lnSpc>
-            </a:pPr>
-            <a:r>
-              <a:rPr sz="2670" b="1">
-                <a:solidFill>
-                  <a:srgbClr val="4F3433"/>
-                </a:solidFill>
-                <a:latin typeface="Montserrat"/>
-              </a:rPr>
-              <a:t>A premium product, </a:t>
-            </a:r>
-            <a:r>
-              <a:rPr sz="2670" b="1">
-                <a:solidFill>
-                  <a:srgbClr val="156826"/>
-                </a:solidFill>
-                <a:latin typeface="Montserrat"/>
-              </a:rPr>
-              <a:t>or a standard everyone who works the land can reach?</a:t>
-            </a:r>
-          </a:p>
-        </p:txBody>
-      </p:sp>
-      <p:sp>
-        <p:nvSpPr>
-          <p:cNvPr id="12" name="cta"/>
-          <p:cNvSpPr txBox="1"/>
-          <p:nvPr/>
-        </p:nvSpPr>
-        <p:spPr>
-          <a:xfrm>
-            <a:off x="626533" y="10498667"/>
-            <a:ext cx="7924800" cy="508000"/>
-          </a:xfrm>
-          <a:prstGeom prst="rect">
-            <a:avLst/>
-          </a:prstGeom>
-          <a:noFill/>
-        </p:spPr>
-        <p:txBody>
-          <a:bodyPr wrap="square" lIns="0" rIns="0" tIns="0" bIns="0">
-            <a:spAutoFit/>
-          </a:bodyPr>
-          <a:lstStyle/>
-          <a:p>
-            <a:pPr algn="l">
-              <a:lnSpc>
-                <a:spcPct val="125000"/>
-              </a:lnSpc>
-            </a:pPr>
-            <a:r>
-              <a:rPr sz="2270" b="1">
-                <a:solidFill>
-                  <a:srgbClr val="4F3433"/>
-                </a:solidFill>
-                <a:latin typeface="Source Sans Pro"/>
-              </a:rPr>
-              <a:t>What does regenerative mean to you? Tell us in the comments.</a:t>
             </a:r>
           </a:p>
         </p:txBody>
